--- a/output/1_2.pptx
+++ b/output/1_2.pptx
@@ -3838,9 +3838,9 @@
           <p:nvPr/>
         </p:nvCxnSpPr>
         <p:spPr>
-          <a:xfrm flipV="1">
-            <a:off x="5029200.0" y="1645462.8"/>
-            <a:ext cx="11887.200000000186" cy="11887.199999999953"/>
+          <a:xfrm>
+            <a:off x="5006340.0" y="2091690.0"/>
+            <a:ext cx="18288.0" cy="18288.0"/>
           </a:xfrm>
           <a:prstGeom prst="line">
             <a:avLst/>
@@ -3874,8 +3874,8 @@
         </p:nvCxnSpPr>
         <p:spPr>
           <a:xfrm flipV="1">
-            <a:off x="5041087.2" y="1633118.4"/>
-            <a:ext cx="12344.399999999441" cy="12344.40000000014"/>
+            <a:off x="5029200.0" y="1648206.0"/>
+            <a:ext cx="9144.0" cy="9144.0"/>
           </a:xfrm>
           <a:prstGeom prst="line">
             <a:avLst/>
@@ -3909,8 +3909,8 @@
         </p:nvCxnSpPr>
         <p:spPr>
           <a:xfrm flipV="1">
-            <a:off x="5053431.6" y="1621231.2"/>
-            <a:ext cx="11887.200000000186" cy="11887.199999999953"/>
+            <a:off x="5038344.0" y="1639062.0"/>
+            <a:ext cx="9144.0" cy="9144.0"/>
           </a:xfrm>
           <a:prstGeom prst="line">
             <a:avLst/>
@@ -3944,8 +3944,8 @@
         </p:nvCxnSpPr>
         <p:spPr>
           <a:xfrm flipV="1">
-            <a:off x="5065318.8" y="1609344.0"/>
-            <a:ext cx="11887.200000000186" cy="11887.199999999953"/>
+            <a:off x="5047488.0" y="1629918.0"/>
+            <a:ext cx="9144.0" cy="9144.0"/>
           </a:xfrm>
           <a:prstGeom prst="line">
             <a:avLst/>
@@ -3979,8 +3979,8 @@
         </p:nvCxnSpPr>
         <p:spPr>
           <a:xfrm flipV="1">
-            <a:off x="5077206.0" y="1596999.6"/>
-            <a:ext cx="12344.400000000373" cy="12344.399999999907"/>
+            <a:off x="5056632.0" y="1620774.0"/>
+            <a:ext cx="9144.0" cy="9144.0"/>
           </a:xfrm>
           <a:prstGeom prst="line">
             <a:avLst/>
@@ -4014,8 +4014,8 @@
         </p:nvCxnSpPr>
         <p:spPr>
           <a:xfrm flipV="1">
-            <a:off x="5089550.4" y="1585112.4"/>
-            <a:ext cx="11887.199999999255" cy="11887.200000000186"/>
+            <a:off x="5065776.0" y="1611630.0"/>
+            <a:ext cx="9144.0" cy="9144.0"/>
           </a:xfrm>
           <a:prstGeom prst="line">
             <a:avLst/>
@@ -4049,8 +4049,8 @@
         </p:nvCxnSpPr>
         <p:spPr>
           <a:xfrm flipV="1">
-            <a:off x="5101437.6" y="1573225.2"/>
-            <a:ext cx="11887.200000000186" cy="11887.199999999953"/>
+            <a:off x="5074920.0" y="1602486.0"/>
+            <a:ext cx="9144.0" cy="9144.0"/>
           </a:xfrm>
           <a:prstGeom prst="line">
             <a:avLst/>
@@ -4084,8 +4084,8 @@
         </p:nvCxnSpPr>
         <p:spPr>
           <a:xfrm flipV="1">
-            <a:off x="5113324.8" y="1560880.8"/>
-            <a:ext cx="12344.400000000373" cy="12344.399999999907"/>
+            <a:off x="5084064.0" y="1593342.0"/>
+            <a:ext cx="9144.0" cy="9144.0"/>
           </a:xfrm>
           <a:prstGeom prst="line">
             <a:avLst/>
@@ -4119,8 +4119,8 @@
         </p:nvCxnSpPr>
         <p:spPr>
           <a:xfrm flipV="1">
-            <a:off x="5125669.2" y="1548993.6"/>
-            <a:ext cx="11887.200000000186" cy="11887.199999999953"/>
+            <a:off x="5093208.0" y="1584198.0"/>
+            <a:ext cx="9144.0" cy="9144.0"/>
           </a:xfrm>
           <a:prstGeom prst="line">
             <a:avLst/>
@@ -4154,8 +4154,8 @@
         </p:nvCxnSpPr>
         <p:spPr>
           <a:xfrm flipV="1">
-            <a:off x="5137556.4" y="1537106.4"/>
-            <a:ext cx="11887.199999999255" cy="11887.200000000186"/>
+            <a:off x="5102352.0" y="1575054.0"/>
+            <a:ext cx="9144.0" cy="9144.0"/>
           </a:xfrm>
           <a:prstGeom prst="line">
             <a:avLst/>
@@ -4189,8 +4189,8 @@
         </p:nvCxnSpPr>
         <p:spPr>
           <a:xfrm flipV="1">
-            <a:off x="5149443.6" y="1525219.2"/>
-            <a:ext cx="11887.200000000186" cy="11887.199999999953"/>
+            <a:off x="5111496.0" y="1565910.0"/>
+            <a:ext cx="9144.0" cy="9144.0"/>
           </a:xfrm>
           <a:prstGeom prst="line">
             <a:avLst/>
@@ -4224,8 +4224,8 @@
         </p:nvCxnSpPr>
         <p:spPr>
           <a:xfrm flipV="1">
-            <a:off x="5161330.8" y="1512874.8"/>
-            <a:ext cx="12344.400000000373" cy="12344.399999999907"/>
+            <a:off x="5120640.0" y="1556766.0"/>
+            <a:ext cx="9144.0" cy="9144.0"/>
           </a:xfrm>
           <a:prstGeom prst="line">
             <a:avLst/>
@@ -4259,8 +4259,8 @@
         </p:nvCxnSpPr>
         <p:spPr>
           <a:xfrm flipV="1">
-            <a:off x="5173675.2" y="1500987.5999999999"/>
-            <a:ext cx="11887.200000000186" cy="11887.200000000186"/>
+            <a:off x="5129784.0" y="1547622.0"/>
+            <a:ext cx="9144.0" cy="9144.0"/>
           </a:xfrm>
           <a:prstGeom prst="line">
             <a:avLst/>
@@ -4294,8 +4294,8 @@
         </p:nvCxnSpPr>
         <p:spPr>
           <a:xfrm flipV="1">
-            <a:off x="5185562.4" y="1489100.4000000001"/>
-            <a:ext cx="11887.199999999255" cy="11887.19999999972"/>
+            <a:off x="5138928.0" y="1538478.0"/>
+            <a:ext cx="9144.0" cy="9144.0"/>
           </a:xfrm>
           <a:prstGeom prst="line">
             <a:avLst/>
@@ -4329,8 +4329,8 @@
         </p:nvCxnSpPr>
         <p:spPr>
           <a:xfrm flipV="1">
-            <a:off x="5197449.6" y="1476756.0"/>
-            <a:ext cx="12344.400000000373" cy="12344.40000000014"/>
+            <a:off x="5148072.0" y="1529334.0"/>
+            <a:ext cx="9144.0" cy="9144.0"/>
           </a:xfrm>
           <a:prstGeom prst="line">
             <a:avLst/>
@@ -4364,8 +4364,8 @@
         </p:nvCxnSpPr>
         <p:spPr>
           <a:xfrm flipV="1">
-            <a:off x="5209794.0" y="1464868.8"/>
-            <a:ext cx="11887.200000000186" cy="11887.199999999953"/>
+            <a:off x="5157216.0" y="1520190.0"/>
+            <a:ext cx="9144.0" cy="9144.0"/>
           </a:xfrm>
           <a:prstGeom prst="line">
             <a:avLst/>
@@ -4399,8 +4399,8 @@
         </p:nvCxnSpPr>
         <p:spPr>
           <a:xfrm flipV="1">
-            <a:off x="5221681.2" y="1452981.5999999999"/>
-            <a:ext cx="11887.200000000186" cy="11887.200000000186"/>
+            <a:off x="5166360.0" y="1511046.0"/>
+            <a:ext cx="9144.0" cy="9144.0"/>
           </a:xfrm>
           <a:prstGeom prst="line">
             <a:avLst/>
@@ -4434,8 +4434,8 @@
         </p:nvCxnSpPr>
         <p:spPr>
           <a:xfrm flipV="1">
-            <a:off x="5233568.4" y="1440637.2"/>
-            <a:ext cx="12344.399999999441" cy="12344.399999999907"/>
+            <a:off x="5175504.0" y="1501902.0"/>
+            <a:ext cx="9144.0" cy="9144.0"/>
           </a:xfrm>
           <a:prstGeom prst="line">
             <a:avLst/>
@@ -4469,8 +4469,8 @@
         </p:nvCxnSpPr>
         <p:spPr>
           <a:xfrm flipV="1">
-            <a:off x="5245912.8" y="1428750.0"/>
-            <a:ext cx="11887.200000000186" cy="11887.199999999953"/>
+            <a:off x="5184648.0" y="1492758.0"/>
+            <a:ext cx="9144.0" cy="9144.0"/>
           </a:xfrm>
           <a:prstGeom prst="line">
             <a:avLst/>
@@ -4496,9 +4496,79 @@
           </a:fontRef>
         </p:style>
       </p:cxnSp>
-      <p:sp>
-        <p:nvSpPr>
-          <p:cNvPr id="42" name="Oval 41"/>
+      <p:cxnSp>
+        <p:nvCxnSpPr>
+          <p:cNvPr id="42" name="Connector 41"/>
+          <p:cNvCxnSpPr/>
+          <p:nvPr/>
+        </p:nvCxnSpPr>
+        <p:spPr>
+          <a:xfrm flipV="1">
+            <a:off x="5193792.0" y="1483614.0"/>
+            <a:ext cx="9144.0" cy="9144.0"/>
+          </a:xfrm>
+          <a:prstGeom prst="line">
+            <a:avLst/>
+          </a:prstGeom>
+          <a:ln w="25400">
+            <a:solidFill>
+              <a:srgbClr val="00C8FF"/>
+            </a:solidFill>
+          </a:ln>
+        </p:spPr>
+        <p:style>
+          <a:lnRef idx="2">
+            <a:schemeClr val="accent1"/>
+          </a:lnRef>
+          <a:fillRef idx="0">
+            <a:schemeClr val="accent1"/>
+          </a:fillRef>
+          <a:effectRef idx="1">
+            <a:schemeClr val="accent1"/>
+          </a:effectRef>
+          <a:fontRef idx="minor">
+            <a:schemeClr val="tx1"/>
+          </a:fontRef>
+        </p:style>
+      </p:cxnSp>
+      <p:cxnSp>
+        <p:nvCxnSpPr>
+          <p:cNvPr id="43" name="Connector 42"/>
+          <p:cNvCxnSpPr/>
+          <p:nvPr/>
+        </p:nvCxnSpPr>
+        <p:spPr>
+          <a:xfrm flipV="1">
+            <a:off x="5202936.0" y="1474470.0"/>
+            <a:ext cx="9144.0" cy="9144.0"/>
+          </a:xfrm>
+          <a:prstGeom prst="line">
+            <a:avLst/>
+          </a:prstGeom>
+          <a:ln w="25400">
+            <a:solidFill>
+              <a:srgbClr val="00C8FF"/>
+            </a:solidFill>
+          </a:ln>
+        </p:spPr>
+        <p:style>
+          <a:lnRef idx="2">
+            <a:schemeClr val="accent1"/>
+          </a:lnRef>
+          <a:fillRef idx="0">
+            <a:schemeClr val="accent1"/>
+          </a:fillRef>
+          <a:effectRef idx="1">
+            <a:schemeClr val="accent1"/>
+          </a:effectRef>
+          <a:fontRef idx="minor">
+            <a:schemeClr val="tx1"/>
+          </a:fontRef>
+        </p:style>
+      </p:cxnSp>
+      <p:sp>
+        <p:nvSpPr>
+          <p:cNvPr id="44" name="Oval 43"/>
           <p:cNvSpPr/>
           <p:nvPr/>
         </p:nvSpPr>
@@ -4541,7 +4611,7 @@
       </p:sp>
       <p:sp>
         <p:nvSpPr>
-          <p:cNvPr id="43" name="Oval 42"/>
+          <p:cNvPr id="45" name="Oval 44"/>
           <p:cNvSpPr/>
           <p:nvPr/>
         </p:nvSpPr>
@@ -4586,13 +4656,13 @@
       </p:sp>
       <p:sp>
         <p:nvSpPr>
-          <p:cNvPr id="44" name="TextBox 43"/>
+          <p:cNvPr id="46" name="TextBox 45"/>
           <p:cNvSpPr txBox="1"/>
           <p:nvPr/>
         </p:nvSpPr>
         <p:spPr>
           <a:xfrm>
-            <a:off x="5120640" y="1474470"/>
+            <a:off x="4503420" y="2640330"/>
             <a:ext cx="635000" cy="254000"/>
           </a:xfrm>
           <a:prstGeom prst="rect">
@@ -4615,20 +4685,20 @@
               </a:defRPr>
             </a:pPr>
             <a:r>
-              <a:t>$y=f(x)$</a:t>
-            </a:r>
-          </a:p>
-        </p:txBody>
-      </p:sp>
-      <p:sp>
-        <p:nvSpPr>
-          <p:cNvPr id="45" name="TextBox 44"/>
+              <a:t>O</a:t>
+            </a:r>
+          </a:p>
+        </p:txBody>
+      </p:sp>
+      <p:sp>
+        <p:nvSpPr>
+          <p:cNvPr id="47" name="TextBox 46"/>
           <p:cNvSpPr txBox="1"/>
           <p:nvPr/>
         </p:nvSpPr>
         <p:spPr>
           <a:xfrm>
-            <a:off x="4480560" y="1657350"/>
+            <a:off x="5303520" y="2640330"/>
             <a:ext cx="635000" cy="254000"/>
           </a:xfrm>
           <a:prstGeom prst="rect">
@@ -4651,20 +4721,20 @@
               </a:defRPr>
             </a:pPr>
             <a:r>
-              <a:t>$2$</a:t>
-            </a:r>
-          </a:p>
-        </p:txBody>
-      </p:sp>
-      <p:sp>
-        <p:nvSpPr>
-          <p:cNvPr id="46" name="TextBox 45"/>
+              <a:t>x</a:t>
+            </a:r>
+          </a:p>
+        </p:txBody>
+      </p:sp>
+      <p:sp>
+        <p:nvSpPr>
+          <p:cNvPr id="48" name="TextBox 47"/>
           <p:cNvSpPr txBox="1"/>
           <p:nvPr/>
         </p:nvSpPr>
         <p:spPr>
           <a:xfrm>
-            <a:off x="4480560" y="2114550"/>
+            <a:off x="4503420" y="1383030"/>
             <a:ext cx="635000" cy="254000"/>
           </a:xfrm>
           <a:prstGeom prst="rect">
@@ -4687,20 +4757,20 @@
               </a:defRPr>
             </a:pPr>
             <a:r>
-              <a:t>$1$</a:t>
-            </a:r>
-          </a:p>
-        </p:txBody>
-      </p:sp>
-      <p:sp>
-        <p:nvSpPr>
-          <p:cNvPr id="47" name="TextBox 46"/>
+              <a:t>y</a:t>
+            </a:r>
+          </a:p>
+        </p:txBody>
+      </p:sp>
+      <p:sp>
+        <p:nvSpPr>
+          <p:cNvPr id="49" name="TextBox 48"/>
           <p:cNvSpPr txBox="1"/>
           <p:nvPr/>
         </p:nvSpPr>
         <p:spPr>
           <a:xfrm>
-            <a:off x="5029200" y="2663190"/>
+            <a:off x="5029200" y="2640330"/>
             <a:ext cx="635000" cy="254000"/>
           </a:xfrm>
           <a:prstGeom prst="rect">
@@ -4723,20 +4793,20 @@
               </a:defRPr>
             </a:pPr>
             <a:r>
-              <a:t>$1$</a:t>
-            </a:r>
-          </a:p>
-        </p:txBody>
-      </p:sp>
-      <p:sp>
-        <p:nvSpPr>
-          <p:cNvPr id="48" name="TextBox 47"/>
+              <a:t>1</a:t>
+            </a:r>
+          </a:p>
+        </p:txBody>
+      </p:sp>
+      <p:sp>
+        <p:nvSpPr>
+          <p:cNvPr id="50" name="TextBox 49"/>
           <p:cNvSpPr txBox="1"/>
           <p:nvPr/>
         </p:nvSpPr>
         <p:spPr>
           <a:xfrm>
-            <a:off x="4526280" y="2617470"/>
+            <a:off x="4503420" y="2114550"/>
             <a:ext cx="635000" cy="254000"/>
           </a:xfrm>
           <a:prstGeom prst="rect">
@@ -4759,7 +4829,79 @@
               </a:defRPr>
             </a:pPr>
             <a:r>
-              <a:t>$O$</a:t>
+              <a:t>1</a:t>
+            </a:r>
+          </a:p>
+        </p:txBody>
+      </p:sp>
+      <p:sp>
+        <p:nvSpPr>
+          <p:cNvPr id="51" name="TextBox 50"/>
+          <p:cNvSpPr txBox="1"/>
+          <p:nvPr/>
+        </p:nvSpPr>
+        <p:spPr>
+          <a:xfrm>
+            <a:off x="4503420" y="1657350"/>
+            <a:ext cx="635000" cy="254000"/>
+          </a:xfrm>
+          <a:prstGeom prst="rect">
+            <a:avLst/>
+          </a:prstGeom>
+          <a:noFill/>
+        </p:spPr>
+        <p:txBody>
+          <a:bodyPr wrap="none">
+            <a:spAutoFit/>
+          </a:bodyPr>
+          <a:lstStyle/>
+          <a:p>
+            <a:pPr>
+              <a:defRPr sz="1200">
+                <a:solidFill>
+                  <a:srgbClr val="FFFFFF"/>
+                </a:solidFill>
+                <a:latin typeface="Inter"/>
+              </a:defRPr>
+            </a:pPr>
+            <a:r>
+              <a:t>2</a:t>
+            </a:r>
+          </a:p>
+        </p:txBody>
+      </p:sp>
+      <p:sp>
+        <p:nvSpPr>
+          <p:cNvPr id="52" name="TextBox 51"/>
+          <p:cNvSpPr txBox="1"/>
+          <p:nvPr/>
+        </p:nvSpPr>
+        <p:spPr>
+          <a:xfrm>
+            <a:off x="5074920" y="1474470"/>
+            <a:ext cx="635000" cy="254000"/>
+          </a:xfrm>
+          <a:prstGeom prst="rect">
+            <a:avLst/>
+          </a:prstGeom>
+          <a:noFill/>
+        </p:spPr>
+        <p:txBody>
+          <a:bodyPr wrap="none">
+            <a:spAutoFit/>
+          </a:bodyPr>
+          <a:lstStyle/>
+          <a:p>
+            <a:pPr>
+              <a:defRPr sz="1200">
+                <a:solidFill>
+                  <a:srgbClr val="FFFFFF"/>
+                </a:solidFill>
+                <a:latin typeface="Inter"/>
+              </a:defRPr>
+            </a:pPr>
+            <a:r>
+              <a:t>y=f(x)</a:t>
             </a:r>
           </a:p>
         </p:txBody>

--- a/output/1_2.pptx
+++ b/output/1_2.pptx
@@ -3175,7 +3175,7 @@
         <p:spPr>
           <a:xfrm>
             <a:off x="4572000.0" y="1657350.0"/>
-            <a:ext cx="22860.0" cy="22860.0"/>
+            <a:ext cx="21534.12000000011" cy="21534.12000000011"/>
           </a:xfrm>
           <a:prstGeom prst="line">
             <a:avLst/>
@@ -3209,8 +3209,8 @@
         </p:nvCxnSpPr>
         <p:spPr>
           <a:xfrm>
-            <a:off x="4594860.0" y="1680210.0"/>
-            <a:ext cx="22860.0" cy="22860.0"/>
+            <a:off x="4593534.12" y="1678884.12"/>
+            <a:ext cx="21579.83999999985" cy="21579.83999999985"/>
           </a:xfrm>
           <a:prstGeom prst="line">
             <a:avLst/>
@@ -3244,8 +3244,8 @@
         </p:nvCxnSpPr>
         <p:spPr>
           <a:xfrm>
-            <a:off x="4617720.0" y="1703070.0"/>
-            <a:ext cx="22860.0" cy="22860.0"/>
+            <a:off x="4615113.96" y="1700463.96"/>
+            <a:ext cx="21534.12000000011" cy="21534.12000000011"/>
           </a:xfrm>
           <a:prstGeom prst="line">
             <a:avLst/>
@@ -3279,8 +3279,8 @@
         </p:nvCxnSpPr>
         <p:spPr>
           <a:xfrm>
-            <a:off x="4640580.0" y="1725930.0"/>
-            <a:ext cx="22860.0" cy="22860.0"/>
+            <a:off x="4636648.08" y="1721998.08"/>
+            <a:ext cx="21579.83999999985" cy="21579.83999999985"/>
           </a:xfrm>
           <a:prstGeom prst="line">
             <a:avLst/>
@@ -3314,8 +3314,8 @@
         </p:nvCxnSpPr>
         <p:spPr>
           <a:xfrm>
-            <a:off x="4663440.0" y="1748790.0"/>
-            <a:ext cx="22860.0" cy="22860.0"/>
+            <a:off x="4658227.92" y="1743577.92"/>
+            <a:ext cx="21534.12000000011" cy="21534.12000000011"/>
           </a:xfrm>
           <a:prstGeom prst="line">
             <a:avLst/>
@@ -3349,8 +3349,8 @@
         </p:nvCxnSpPr>
         <p:spPr>
           <a:xfrm>
-            <a:off x="4686300.0" y="1771650.0"/>
-            <a:ext cx="22860.0" cy="22860.0"/>
+            <a:off x="4679762.04" y="1765112.04"/>
+            <a:ext cx="21579.83999999985" cy="21579.83999999985"/>
           </a:xfrm>
           <a:prstGeom prst="line">
             <a:avLst/>
@@ -3384,8 +3384,8 @@
         </p:nvCxnSpPr>
         <p:spPr>
           <a:xfrm>
-            <a:off x="4709160.0" y="1794510.0"/>
-            <a:ext cx="22860.0" cy="22860.0"/>
+            <a:off x="4701341.88" y="1786691.88"/>
+            <a:ext cx="21579.83999999985" cy="21579.840000000084"/>
           </a:xfrm>
           <a:prstGeom prst="line">
             <a:avLst/>
@@ -3419,8 +3419,8 @@
         </p:nvCxnSpPr>
         <p:spPr>
           <a:xfrm>
-            <a:off x="4732020.0" y="1817370.0"/>
-            <a:ext cx="22860.0" cy="22860.0"/>
+            <a:off x="4722921.72" y="1808271.72"/>
+            <a:ext cx="21534.12000000011" cy="21534.11999999988"/>
           </a:xfrm>
           <a:prstGeom prst="line">
             <a:avLst/>
@@ -3454,8 +3454,8 @@
         </p:nvCxnSpPr>
         <p:spPr>
           <a:xfrm>
-            <a:off x="4754880.0" y="1840230.0"/>
-            <a:ext cx="22860.0" cy="22860.0"/>
+            <a:off x="4744455.84" y="1829805.8399999999"/>
+            <a:ext cx="21579.83999999985" cy="21579.840000000317"/>
           </a:xfrm>
           <a:prstGeom prst="line">
             <a:avLst/>
@@ -3489,8 +3489,8 @@
         </p:nvCxnSpPr>
         <p:spPr>
           <a:xfrm>
-            <a:off x="4777740.0" y="1863090.0"/>
-            <a:ext cx="22860.0" cy="22860.0"/>
+            <a:off x="4766035.68" y="1851385.6800000002"/>
+            <a:ext cx="21534.12000000011" cy="21534.11999999988"/>
           </a:xfrm>
           <a:prstGeom prst="line">
             <a:avLst/>
@@ -3524,8 +3524,8 @@
         </p:nvCxnSpPr>
         <p:spPr>
           <a:xfrm>
-            <a:off x="4800600.0" y="1885950.0"/>
-            <a:ext cx="22860.0" cy="22860.0"/>
+            <a:off x="4787569.8" y="1872919.8"/>
+            <a:ext cx="21579.83999999985" cy="21579.840000000084"/>
           </a:xfrm>
           <a:prstGeom prst="line">
             <a:avLst/>
@@ -3559,8 +3559,8 @@
         </p:nvCxnSpPr>
         <p:spPr>
           <a:xfrm>
-            <a:off x="4823460.0" y="1908810.0"/>
-            <a:ext cx="22860.0" cy="22860.0"/>
+            <a:off x="4809149.64" y="1894499.6400000001"/>
+            <a:ext cx="21579.840000000782" cy="21579.83999999985"/>
           </a:xfrm>
           <a:prstGeom prst="line">
             <a:avLst/>
@@ -3594,8 +3594,8 @@
         </p:nvCxnSpPr>
         <p:spPr>
           <a:xfrm>
-            <a:off x="4846320.0" y="1931670.0"/>
-            <a:ext cx="22860.0" cy="22860.0"/>
+            <a:off x="4830729.48" y="1916079.48"/>
+            <a:ext cx="21534.11999999918" cy="21534.12000000011"/>
           </a:xfrm>
           <a:prstGeom prst="line">
             <a:avLst/>
@@ -3629,8 +3629,8 @@
         </p:nvCxnSpPr>
         <p:spPr>
           <a:xfrm>
-            <a:off x="4869180.0" y="1954530.0"/>
-            <a:ext cx="22860.0" cy="22860.0"/>
+            <a:off x="4852263.6" y="1937613.6"/>
+            <a:ext cx="21579.840000000782" cy="21579.83999999985"/>
           </a:xfrm>
           <a:prstGeom prst="line">
             <a:avLst/>
@@ -3664,8 +3664,8 @@
         </p:nvCxnSpPr>
         <p:spPr>
           <a:xfrm>
-            <a:off x="4892040.0" y="1977390.0"/>
-            <a:ext cx="22860.0" cy="22860.0"/>
+            <a:off x="4873843.44" y="1959193.44"/>
+            <a:ext cx="21534.11999999918" cy="21534.12000000011"/>
           </a:xfrm>
           <a:prstGeom prst="line">
             <a:avLst/>
@@ -3699,8 +3699,8 @@
         </p:nvCxnSpPr>
         <p:spPr>
           <a:xfrm>
-            <a:off x="4914900.0" y="2000250.0"/>
-            <a:ext cx="22860.0" cy="22860.0"/>
+            <a:off x="4895377.56" y="1980727.56"/>
+            <a:ext cx="21579.840000000782" cy="21579.83999999985"/>
           </a:xfrm>
           <a:prstGeom prst="line">
             <a:avLst/>
@@ -3734,8 +3734,8 @@
         </p:nvCxnSpPr>
         <p:spPr>
           <a:xfrm>
-            <a:off x="4937760.0" y="2023110.0"/>
-            <a:ext cx="22860.0" cy="22860.0"/>
+            <a:off x="4916957.4" y="2002307.4"/>
+            <a:ext cx="21534.11999999918" cy="21534.12000000011"/>
           </a:xfrm>
           <a:prstGeom prst="line">
             <a:avLst/>
@@ -3769,8 +3769,8 @@
         </p:nvCxnSpPr>
         <p:spPr>
           <a:xfrm>
-            <a:off x="4960620.0" y="2045970.0"/>
-            <a:ext cx="22860.0" cy="22860.0"/>
+            <a:off x="4938491.52" y="2023841.52"/>
+            <a:ext cx="21579.840000000782" cy="21579.83999999985"/>
           </a:xfrm>
           <a:prstGeom prst="line">
             <a:avLst/>
@@ -3804,8 +3804,8 @@
         </p:nvCxnSpPr>
         <p:spPr>
           <a:xfrm>
-            <a:off x="4983480.0" y="2068830.0"/>
-            <a:ext cx="22860.0" cy="22860.0"/>
+            <a:off x="4960071.36" y="2045421.3599999999"/>
+            <a:ext cx="21579.83999999985" cy="21579.840000000084"/>
           </a:xfrm>
           <a:prstGeom prst="line">
             <a:avLst/>
@@ -3839,8 +3839,8 @@
         </p:nvCxnSpPr>
         <p:spPr>
           <a:xfrm>
-            <a:off x="5006340.0" y="2091690.0"/>
-            <a:ext cx="18288.0" cy="18288.0"/>
+            <a:off x="4981651.2" y="2067001.2"/>
+            <a:ext cx="21534.12000000011" cy="21534.12000000011"/>
           </a:xfrm>
           <a:prstGeom prst="line">
             <a:avLst/>
@@ -3873,9 +3873,9 @@
           <p:nvPr/>
         </p:nvCxnSpPr>
         <p:spPr>
-          <a:xfrm flipV="1">
-            <a:off x="5029200.0" y="1648206.0"/>
-            <a:ext cx="9144.0" cy="9144.0"/>
+          <a:xfrm>
+            <a:off x="5003185.32" y="2088535.32"/>
+            <a:ext cx="21579.83999999985" cy="21579.840000000084"/>
           </a:xfrm>
           <a:prstGeom prst="line">
             <a:avLst/>
@@ -3909,7 +3909,7 @@
         </p:nvCxnSpPr>
         <p:spPr>
           <a:xfrm flipV="1">
-            <a:off x="5038344.0" y="1639062.0"/>
+            <a:off x="5029200.0" y="1648206.0"/>
             <a:ext cx="9144.0" cy="9144.0"/>
           </a:xfrm>
           <a:prstGeom prst="line">
@@ -3944,7 +3944,7 @@
         </p:nvCxnSpPr>
         <p:spPr>
           <a:xfrm flipV="1">
-            <a:off x="5047488.0" y="1629918.0"/>
+            <a:off x="5038344.0" y="1639062.0"/>
             <a:ext cx="9144.0" cy="9144.0"/>
           </a:xfrm>
           <a:prstGeom prst="line">
@@ -3979,7 +3979,7 @@
         </p:nvCxnSpPr>
         <p:spPr>
           <a:xfrm flipV="1">
-            <a:off x="5056632.0" y="1620774.0"/>
+            <a:off x="5047488.0" y="1629918.0"/>
             <a:ext cx="9144.0" cy="9144.0"/>
           </a:xfrm>
           <a:prstGeom prst="line">
@@ -4014,7 +4014,7 @@
         </p:nvCxnSpPr>
         <p:spPr>
           <a:xfrm flipV="1">
-            <a:off x="5065776.0" y="1611630.0"/>
+            <a:off x="5056632.0" y="1620774.0"/>
             <a:ext cx="9144.0" cy="9144.0"/>
           </a:xfrm>
           <a:prstGeom prst="line">
@@ -4049,7 +4049,7 @@
         </p:nvCxnSpPr>
         <p:spPr>
           <a:xfrm flipV="1">
-            <a:off x="5074920.0" y="1602486.0"/>
+            <a:off x="5065776.0" y="1611630.0"/>
             <a:ext cx="9144.0" cy="9144.0"/>
           </a:xfrm>
           <a:prstGeom prst="line">
@@ -4084,7 +4084,7 @@
         </p:nvCxnSpPr>
         <p:spPr>
           <a:xfrm flipV="1">
-            <a:off x="5084064.0" y="1593342.0"/>
+            <a:off x="5074920.0" y="1602486.0"/>
             <a:ext cx="9144.0" cy="9144.0"/>
           </a:xfrm>
           <a:prstGeom prst="line">
@@ -4119,7 +4119,7 @@
         </p:nvCxnSpPr>
         <p:spPr>
           <a:xfrm flipV="1">
-            <a:off x="5093208.0" y="1584198.0"/>
+            <a:off x="5084064.0" y="1593342.0"/>
             <a:ext cx="9144.0" cy="9144.0"/>
           </a:xfrm>
           <a:prstGeom prst="line">
@@ -4154,7 +4154,7 @@
         </p:nvCxnSpPr>
         <p:spPr>
           <a:xfrm flipV="1">
-            <a:off x="5102352.0" y="1575054.0"/>
+            <a:off x="5093208.0" y="1584198.0"/>
             <a:ext cx="9144.0" cy="9144.0"/>
           </a:xfrm>
           <a:prstGeom prst="line">
@@ -4189,7 +4189,7 @@
         </p:nvCxnSpPr>
         <p:spPr>
           <a:xfrm flipV="1">
-            <a:off x="5111496.0" y="1565910.0"/>
+            <a:off x="5102352.0" y="1575054.0"/>
             <a:ext cx="9144.0" cy="9144.0"/>
           </a:xfrm>
           <a:prstGeom prst="line">
@@ -4224,7 +4224,7 @@
         </p:nvCxnSpPr>
         <p:spPr>
           <a:xfrm flipV="1">
-            <a:off x="5120640.0" y="1556766.0"/>
+            <a:off x="5111496.0" y="1565910.0"/>
             <a:ext cx="9144.0" cy="9144.0"/>
           </a:xfrm>
           <a:prstGeom prst="line">
@@ -4259,7 +4259,7 @@
         </p:nvCxnSpPr>
         <p:spPr>
           <a:xfrm flipV="1">
-            <a:off x="5129784.0" y="1547622.0"/>
+            <a:off x="5120640.0" y="1556766.0"/>
             <a:ext cx="9144.0" cy="9144.0"/>
           </a:xfrm>
           <a:prstGeom prst="line">
@@ -4294,7 +4294,7 @@
         </p:nvCxnSpPr>
         <p:spPr>
           <a:xfrm flipV="1">
-            <a:off x="5138928.0" y="1538478.0"/>
+            <a:off x="5129784.0" y="1547622.0"/>
             <a:ext cx="9144.0" cy="9144.0"/>
           </a:xfrm>
           <a:prstGeom prst="line">
@@ -4329,7 +4329,7 @@
         </p:nvCxnSpPr>
         <p:spPr>
           <a:xfrm flipV="1">
-            <a:off x="5148072.0" y="1529334.0"/>
+            <a:off x="5138928.0" y="1538478.0"/>
             <a:ext cx="9144.0" cy="9144.0"/>
           </a:xfrm>
           <a:prstGeom prst="line">
@@ -4364,7 +4364,7 @@
         </p:nvCxnSpPr>
         <p:spPr>
           <a:xfrm flipV="1">
-            <a:off x="5157216.0" y="1520190.0"/>
+            <a:off x="5148072.0" y="1529334.0"/>
             <a:ext cx="9144.0" cy="9144.0"/>
           </a:xfrm>
           <a:prstGeom prst="line">
@@ -4399,7 +4399,7 @@
         </p:nvCxnSpPr>
         <p:spPr>
           <a:xfrm flipV="1">
-            <a:off x="5166360.0" y="1511046.0"/>
+            <a:off x="5157216.0" y="1520190.0"/>
             <a:ext cx="9144.0" cy="9144.0"/>
           </a:xfrm>
           <a:prstGeom prst="line">
@@ -4434,7 +4434,7 @@
         </p:nvCxnSpPr>
         <p:spPr>
           <a:xfrm flipV="1">
-            <a:off x="5175504.0" y="1501902.0"/>
+            <a:off x="5166360.0" y="1511046.0"/>
             <a:ext cx="9144.0" cy="9144.0"/>
           </a:xfrm>
           <a:prstGeom prst="line">
@@ -4469,7 +4469,7 @@
         </p:nvCxnSpPr>
         <p:spPr>
           <a:xfrm flipV="1">
-            <a:off x="5184648.0" y="1492758.0"/>
+            <a:off x="5175504.0" y="1501902.0"/>
             <a:ext cx="9144.0" cy="9144.0"/>
           </a:xfrm>
           <a:prstGeom prst="line">
@@ -4504,7 +4504,7 @@
         </p:nvCxnSpPr>
         <p:spPr>
           <a:xfrm flipV="1">
-            <a:off x="5193792.0" y="1483614.0"/>
+            <a:off x="5184648.0" y="1492758.0"/>
             <a:ext cx="9144.0" cy="9144.0"/>
           </a:xfrm>
           <a:prstGeom prst="line">
@@ -4539,7 +4539,7 @@
         </p:nvCxnSpPr>
         <p:spPr>
           <a:xfrm flipV="1">
-            <a:off x="5202936.0" y="1474470.0"/>
+            <a:off x="5193792.0" y="1483614.0"/>
             <a:ext cx="9144.0" cy="9144.0"/>
           </a:xfrm>
           <a:prstGeom prst="line">
@@ -4566,9 +4566,219 @@
           </a:fontRef>
         </p:style>
       </p:cxnSp>
-      <p:sp>
-        <p:nvSpPr>
-          <p:cNvPr id="44" name="Oval 43"/>
+      <p:cxnSp>
+        <p:nvCxnSpPr>
+          <p:cNvPr id="44" name="Connector 43"/>
+          <p:cNvCxnSpPr/>
+          <p:nvPr/>
+        </p:nvCxnSpPr>
+        <p:spPr>
+          <a:xfrm flipV="1">
+            <a:off x="5202936.0" y="1474470.0"/>
+            <a:ext cx="9144.0" cy="9144.0"/>
+          </a:xfrm>
+          <a:prstGeom prst="line">
+            <a:avLst/>
+          </a:prstGeom>
+          <a:ln w="25400">
+            <a:solidFill>
+              <a:srgbClr val="00C8FF"/>
+            </a:solidFill>
+          </a:ln>
+        </p:spPr>
+        <p:style>
+          <a:lnRef idx="2">
+            <a:schemeClr val="accent1"/>
+          </a:lnRef>
+          <a:fillRef idx="0">
+            <a:schemeClr val="accent1"/>
+          </a:fillRef>
+          <a:effectRef idx="1">
+            <a:schemeClr val="accent1"/>
+          </a:effectRef>
+          <a:fontRef idx="minor">
+            <a:schemeClr val="tx1"/>
+          </a:fontRef>
+        </p:style>
+      </p:cxnSp>
+      <p:cxnSp>
+        <p:nvCxnSpPr>
+          <p:cNvPr id="45" name="Connector 44"/>
+          <p:cNvCxnSpPr/>
+          <p:nvPr/>
+        </p:nvCxnSpPr>
+        <p:spPr>
+          <a:xfrm flipV="1">
+            <a:off x="5212080.0" y="1465326.0"/>
+            <a:ext cx="9144.0" cy="9144.0"/>
+          </a:xfrm>
+          <a:prstGeom prst="line">
+            <a:avLst/>
+          </a:prstGeom>
+          <a:ln w="25400">
+            <a:solidFill>
+              <a:srgbClr val="00C8FF"/>
+            </a:solidFill>
+          </a:ln>
+        </p:spPr>
+        <p:style>
+          <a:lnRef idx="2">
+            <a:schemeClr val="accent1"/>
+          </a:lnRef>
+          <a:fillRef idx="0">
+            <a:schemeClr val="accent1"/>
+          </a:fillRef>
+          <a:effectRef idx="1">
+            <a:schemeClr val="accent1"/>
+          </a:effectRef>
+          <a:fontRef idx="minor">
+            <a:schemeClr val="tx1"/>
+          </a:fontRef>
+        </p:style>
+      </p:cxnSp>
+      <p:cxnSp>
+        <p:nvCxnSpPr>
+          <p:cNvPr id="46" name="Connector 45"/>
+          <p:cNvCxnSpPr/>
+          <p:nvPr/>
+        </p:nvCxnSpPr>
+        <p:spPr>
+          <a:xfrm flipV="1">
+            <a:off x="5221224.0" y="1456182.0"/>
+            <a:ext cx="9144.0" cy="9144.0"/>
+          </a:xfrm>
+          <a:prstGeom prst="line">
+            <a:avLst/>
+          </a:prstGeom>
+          <a:ln w="25400">
+            <a:solidFill>
+              <a:srgbClr val="00C8FF"/>
+            </a:solidFill>
+          </a:ln>
+        </p:spPr>
+        <p:style>
+          <a:lnRef idx="2">
+            <a:schemeClr val="accent1"/>
+          </a:lnRef>
+          <a:fillRef idx="0">
+            <a:schemeClr val="accent1"/>
+          </a:fillRef>
+          <a:effectRef idx="1">
+            <a:schemeClr val="accent1"/>
+          </a:effectRef>
+          <a:fontRef idx="minor">
+            <a:schemeClr val="tx1"/>
+          </a:fontRef>
+        </p:style>
+      </p:cxnSp>
+      <p:cxnSp>
+        <p:nvCxnSpPr>
+          <p:cNvPr id="47" name="Connector 46"/>
+          <p:cNvCxnSpPr/>
+          <p:nvPr/>
+        </p:nvCxnSpPr>
+        <p:spPr>
+          <a:xfrm flipV="1">
+            <a:off x="5230368.0" y="1447038.0"/>
+            <a:ext cx="9144.0" cy="9144.0"/>
+          </a:xfrm>
+          <a:prstGeom prst="line">
+            <a:avLst/>
+          </a:prstGeom>
+          <a:ln w="25400">
+            <a:solidFill>
+              <a:srgbClr val="00C8FF"/>
+            </a:solidFill>
+          </a:ln>
+        </p:spPr>
+        <p:style>
+          <a:lnRef idx="2">
+            <a:schemeClr val="accent1"/>
+          </a:lnRef>
+          <a:fillRef idx="0">
+            <a:schemeClr val="accent1"/>
+          </a:fillRef>
+          <a:effectRef idx="1">
+            <a:schemeClr val="accent1"/>
+          </a:effectRef>
+          <a:fontRef idx="minor">
+            <a:schemeClr val="tx1"/>
+          </a:fontRef>
+        </p:style>
+      </p:cxnSp>
+      <p:cxnSp>
+        <p:nvCxnSpPr>
+          <p:cNvPr id="48" name="Connector 47"/>
+          <p:cNvCxnSpPr/>
+          <p:nvPr/>
+        </p:nvCxnSpPr>
+        <p:spPr>
+          <a:xfrm flipV="1">
+            <a:off x="5239512.0" y="1437894.0"/>
+            <a:ext cx="9144.0" cy="9144.0"/>
+          </a:xfrm>
+          <a:prstGeom prst="line">
+            <a:avLst/>
+          </a:prstGeom>
+          <a:ln w="25400">
+            <a:solidFill>
+              <a:srgbClr val="00C8FF"/>
+            </a:solidFill>
+          </a:ln>
+        </p:spPr>
+        <p:style>
+          <a:lnRef idx="2">
+            <a:schemeClr val="accent1"/>
+          </a:lnRef>
+          <a:fillRef idx="0">
+            <a:schemeClr val="accent1"/>
+          </a:fillRef>
+          <a:effectRef idx="1">
+            <a:schemeClr val="accent1"/>
+          </a:effectRef>
+          <a:fontRef idx="minor">
+            <a:schemeClr val="tx1"/>
+          </a:fontRef>
+        </p:style>
+      </p:cxnSp>
+      <p:cxnSp>
+        <p:nvCxnSpPr>
+          <p:cNvPr id="49" name="Connector 48"/>
+          <p:cNvCxnSpPr/>
+          <p:nvPr/>
+        </p:nvCxnSpPr>
+        <p:spPr>
+          <a:xfrm flipV="1">
+            <a:off x="5248656.0" y="1428750.0"/>
+            <a:ext cx="9144.0" cy="9144.0"/>
+          </a:xfrm>
+          <a:prstGeom prst="line">
+            <a:avLst/>
+          </a:prstGeom>
+          <a:ln w="25400">
+            <a:solidFill>
+              <a:srgbClr val="00C8FF"/>
+            </a:solidFill>
+          </a:ln>
+        </p:spPr>
+        <p:style>
+          <a:lnRef idx="2">
+            <a:schemeClr val="accent1"/>
+          </a:lnRef>
+          <a:fillRef idx="0">
+            <a:schemeClr val="accent1"/>
+          </a:fillRef>
+          <a:effectRef idx="1">
+            <a:schemeClr val="accent1"/>
+          </a:effectRef>
+          <a:fontRef idx="minor">
+            <a:schemeClr val="tx1"/>
+          </a:fontRef>
+        </p:style>
+      </p:cxnSp>
+      <p:sp>
+        <p:nvSpPr>
+          <p:cNvPr id="50" name="Oval 49"/>
           <p:cNvSpPr/>
           <p:nvPr/>
         </p:nvSpPr>
@@ -4611,7 +4821,7 @@
       </p:sp>
       <p:sp>
         <p:nvSpPr>
-          <p:cNvPr id="45" name="Oval 44"/>
+          <p:cNvPr id="51" name="Oval 50"/>
           <p:cNvSpPr/>
           <p:nvPr/>
         </p:nvSpPr>
@@ -4656,13 +4866,13 @@
       </p:sp>
       <p:sp>
         <p:nvSpPr>
-          <p:cNvPr id="46" name="TextBox 45"/>
+          <p:cNvPr id="52" name="TextBox 51"/>
           <p:cNvSpPr txBox="1"/>
           <p:nvPr/>
         </p:nvSpPr>
         <p:spPr>
           <a:xfrm>
-            <a:off x="4503420" y="2640330"/>
+            <a:off x="5074920" y="1383030"/>
             <a:ext cx="635000" cy="254000"/>
           </a:xfrm>
           <a:prstGeom prst="rect">
@@ -4685,20 +4895,20 @@
               </a:defRPr>
             </a:pPr>
             <a:r>
-              <a:t>O</a:t>
-            </a:r>
-          </a:p>
-        </p:txBody>
-      </p:sp>
-      <p:sp>
-        <p:nvSpPr>
-          <p:cNvPr id="47" name="TextBox 46"/>
+              <a:t>y=f(x)</a:t>
+            </a:r>
+          </a:p>
+        </p:txBody>
+      </p:sp>
+      <p:sp>
+        <p:nvSpPr>
+          <p:cNvPr id="53" name="TextBox 52"/>
           <p:cNvSpPr txBox="1"/>
           <p:nvPr/>
         </p:nvSpPr>
         <p:spPr>
           <a:xfrm>
-            <a:off x="5303520" y="2640330"/>
+            <a:off x="4526280" y="2617470"/>
             <a:ext cx="635000" cy="254000"/>
           </a:xfrm>
           <a:prstGeom prst="rect">
@@ -4721,20 +4931,20 @@
               </a:defRPr>
             </a:pPr>
             <a:r>
-              <a:t>x</a:t>
-            </a:r>
-          </a:p>
-        </p:txBody>
-      </p:sp>
-      <p:sp>
-        <p:nvSpPr>
-          <p:cNvPr id="48" name="TextBox 47"/>
+              <a:t>O</a:t>
+            </a:r>
+          </a:p>
+        </p:txBody>
+      </p:sp>
+      <p:sp>
+        <p:nvSpPr>
+          <p:cNvPr id="54" name="TextBox 53"/>
           <p:cNvSpPr txBox="1"/>
           <p:nvPr/>
         </p:nvSpPr>
         <p:spPr>
           <a:xfrm>
-            <a:off x="4503420" y="1383030"/>
+            <a:off x="5257800" y="2617470"/>
             <a:ext cx="635000" cy="254000"/>
           </a:xfrm>
           <a:prstGeom prst="rect">
@@ -4757,20 +4967,20 @@
               </a:defRPr>
             </a:pPr>
             <a:r>
-              <a:t>y</a:t>
-            </a:r>
-          </a:p>
-        </p:txBody>
-      </p:sp>
-      <p:sp>
-        <p:nvSpPr>
-          <p:cNvPr id="49" name="TextBox 48"/>
+              <a:t>x</a:t>
+            </a:r>
+          </a:p>
+        </p:txBody>
+      </p:sp>
+      <p:sp>
+        <p:nvSpPr>
+          <p:cNvPr id="55" name="TextBox 54"/>
           <p:cNvSpPr txBox="1"/>
           <p:nvPr/>
         </p:nvSpPr>
         <p:spPr>
           <a:xfrm>
-            <a:off x="5029200" y="2640330"/>
+            <a:off x="4526280" y="1428750"/>
             <a:ext cx="635000" cy="254000"/>
           </a:xfrm>
           <a:prstGeom prst="rect">
@@ -4793,20 +5003,20 @@
               </a:defRPr>
             </a:pPr>
             <a:r>
-              <a:t>1</a:t>
-            </a:r>
-          </a:p>
-        </p:txBody>
-      </p:sp>
-      <p:sp>
-        <p:nvSpPr>
-          <p:cNvPr id="50" name="TextBox 49"/>
+              <a:t>y</a:t>
+            </a:r>
+          </a:p>
+        </p:txBody>
+      </p:sp>
+      <p:sp>
+        <p:nvSpPr>
+          <p:cNvPr id="56" name="TextBox 55"/>
           <p:cNvSpPr txBox="1"/>
           <p:nvPr/>
         </p:nvSpPr>
         <p:spPr>
           <a:xfrm>
-            <a:off x="4503420" y="2114550"/>
+            <a:off x="5029200" y="2617470"/>
             <a:ext cx="635000" cy="254000"/>
           </a:xfrm>
           <a:prstGeom prst="rect">
@@ -4836,13 +5046,13 @@
       </p:sp>
       <p:sp>
         <p:nvSpPr>
-          <p:cNvPr id="51" name="TextBox 50"/>
+          <p:cNvPr id="57" name="TextBox 56"/>
           <p:cNvSpPr txBox="1"/>
           <p:nvPr/>
         </p:nvSpPr>
         <p:spPr>
           <a:xfrm>
-            <a:off x="4503420" y="1657350"/>
+            <a:off x="4526280" y="2114550"/>
             <a:ext cx="635000" cy="254000"/>
           </a:xfrm>
           <a:prstGeom prst="rect">
@@ -4865,20 +5075,20 @@
               </a:defRPr>
             </a:pPr>
             <a:r>
-              <a:t>2</a:t>
-            </a:r>
-          </a:p>
-        </p:txBody>
-      </p:sp>
-      <p:sp>
-        <p:nvSpPr>
-          <p:cNvPr id="52" name="TextBox 51"/>
+              <a:t>1</a:t>
+            </a:r>
+          </a:p>
+        </p:txBody>
+      </p:sp>
+      <p:sp>
+        <p:nvSpPr>
+          <p:cNvPr id="58" name="TextBox 57"/>
           <p:cNvSpPr txBox="1"/>
           <p:nvPr/>
         </p:nvSpPr>
         <p:spPr>
           <a:xfrm>
-            <a:off x="5074920" y="1474470"/>
+            <a:off x="4526280" y="1657350"/>
             <a:ext cx="635000" cy="254000"/>
           </a:xfrm>
           <a:prstGeom prst="rect">
@@ -4901,7 +5111,79 @@
               </a:defRPr>
             </a:pPr>
             <a:r>
-              <a:t>y=f(x)</a:t>
+              <a:t>2</a:t>
+            </a:r>
+          </a:p>
+        </p:txBody>
+      </p:sp>
+      <p:sp>
+        <p:nvSpPr>
+          <p:cNvPr id="59" name="TextBox 58"/>
+          <p:cNvSpPr txBox="1"/>
+          <p:nvPr/>
+        </p:nvSpPr>
+        <p:spPr>
+          <a:xfrm>
+            <a:off x="4892040" y="2640330"/>
+            <a:ext cx="635000" cy="254000"/>
+          </a:xfrm>
+          <a:prstGeom prst="rect">
+            <a:avLst/>
+          </a:prstGeom>
+          <a:noFill/>
+        </p:spPr>
+        <p:txBody>
+          <a:bodyPr wrap="none">
+            <a:spAutoFit/>
+          </a:bodyPr>
+          <a:lstStyle/>
+          <a:p>
+            <a:pPr>
+              <a:defRPr sz="1200">
+                <a:solidFill>
+                  <a:srgbClr val="FFFFFF"/>
+                </a:solidFill>
+                <a:latin typeface="Inter"/>
+              </a:defRPr>
+            </a:pPr>
+            <a:r>
+              <a:t>\longleftarrow</a:t>
+            </a:r>
+          </a:p>
+        </p:txBody>
+      </p:sp>
+      <p:sp>
+        <p:nvSpPr>
+          <p:cNvPr id="60" name="TextBox 59"/>
+          <p:cNvSpPr txBox="1"/>
+          <p:nvPr/>
+        </p:nvSpPr>
+        <p:spPr>
+          <a:xfrm>
+            <a:off x="5166360" y="2640330"/>
+            <a:ext cx="635000" cy="254000"/>
+          </a:xfrm>
+          <a:prstGeom prst="rect">
+            <a:avLst/>
+          </a:prstGeom>
+          <a:noFill/>
+        </p:spPr>
+        <p:txBody>
+          <a:bodyPr wrap="none">
+            <a:spAutoFit/>
+          </a:bodyPr>
+          <a:lstStyle/>
+          <a:p>
+            <a:pPr>
+              <a:defRPr sz="1200">
+                <a:solidFill>
+                  <a:srgbClr val="FFFFFF"/>
+                </a:solidFill>
+                <a:latin typeface="Inter"/>
+              </a:defRPr>
+            </a:pPr>
+            <a:r>
+              <a:t>\longrightarrow</a:t>
             </a:r>
           </a:p>
         </p:txBody>
